--- a/data/deep_dives/carteira_pagaleve_fidc_79a8f49f/exports/documentary_comparison.pptx
+++ b/data/deep_dives/carteira_pagaleve_fidc_79a8f49f/exports/documentary_comparison.pptx
@@ -4286,7 +4286,7 @@
                       <a:r>
                         <a:rPr sz="1300" b="1">
                           <a:solidFill>
-                            <a:srgbClr val="1F1F1F"/>
+                            <a:srgbClr val="FFFFFF"/>
                           </a:solidFill>
                           <a:latin typeface="Calibri"/>
                         </a:rPr>
@@ -4296,7 +4296,7 @@
                   </a:txBody>
                   <a:tcPr marL="91440" marR="91440" marT="41148" marB="41148" anchor="ctr">
                     <a:solidFill>
-                      <a:srgbClr val="EC7000"/>
+                      <a:srgbClr val="FF6200"/>
                     </a:solidFill>
                     <a:lnL>
                       <a:noFill/>
@@ -4335,7 +4335,7 @@
                       <a:r>
                         <a:rPr sz="1300" b="1">
                           <a:solidFill>
-                            <a:srgbClr val="1F1F1F"/>
+                            <a:srgbClr val="FFFFFF"/>
                           </a:solidFill>
                           <a:latin typeface="Calibri"/>
                         </a:rPr>
@@ -4345,7 +4345,7 @@
                   </a:txBody>
                   <a:tcPr marL="91440" marR="91440" marT="41148" marB="41148" anchor="ctr">
                     <a:solidFill>
-                      <a:srgbClr val="EC7000"/>
+                      <a:srgbClr val="FF6200"/>
                     </a:solidFill>
                     <a:lnL>
                       <a:noFill/>
@@ -5123,7 +5123,7 @@
                       <a:r>
                         <a:rPr sz="1300" b="1">
                           <a:solidFill>
-                            <a:srgbClr val="1F1F1F"/>
+                            <a:srgbClr val="FFFFFF"/>
                           </a:solidFill>
                           <a:latin typeface="Calibri"/>
                         </a:rPr>
@@ -5133,7 +5133,7 @@
                   </a:txBody>
                   <a:tcPr marL="91440" marR="91440" marT="41148" marB="41148" anchor="ctr">
                     <a:solidFill>
-                      <a:srgbClr val="EC7000"/>
+                      <a:srgbClr val="FF6200"/>
                     </a:solidFill>
                     <a:lnL>
                       <a:noFill/>
@@ -5172,7 +5172,7 @@
                       <a:r>
                         <a:rPr sz="1300" b="1">
                           <a:solidFill>
-                            <a:srgbClr val="1F1F1F"/>
+                            <a:srgbClr val="FFFFFF"/>
                           </a:solidFill>
                           <a:latin typeface="Calibri"/>
                         </a:rPr>
@@ -5182,7 +5182,7 @@
                   </a:txBody>
                   <a:tcPr marL="91440" marR="91440" marT="41148" marB="41148" anchor="ctr">
                     <a:solidFill>
-                      <a:srgbClr val="EC7000"/>
+                      <a:srgbClr val="FF6200"/>
                     </a:solidFill>
                     <a:lnL>
                       <a:noFill/>
@@ -5908,7 +5908,7 @@
                       <a:r>
                         <a:rPr sz="1300" b="1">
                           <a:solidFill>
-                            <a:srgbClr val="1F1F1F"/>
+                            <a:srgbClr val="FFFFFF"/>
                           </a:solidFill>
                           <a:latin typeface="Calibri"/>
                         </a:rPr>
@@ -5918,7 +5918,7 @@
                   </a:txBody>
                   <a:tcPr marL="91440" marR="91440" marT="41148" marB="41148" anchor="ctr">
                     <a:solidFill>
-                      <a:srgbClr val="EC7000"/>
+                      <a:srgbClr val="FF6200"/>
                     </a:solidFill>
                     <a:lnL>
                       <a:noFill/>
@@ -5957,7 +5957,7 @@
                       <a:r>
                         <a:rPr sz="1300" b="1">
                           <a:solidFill>
-                            <a:srgbClr val="1F1F1F"/>
+                            <a:srgbClr val="FFFFFF"/>
                           </a:solidFill>
                           <a:latin typeface="Calibri"/>
                         </a:rPr>
@@ -5967,7 +5967,7 @@
                   </a:txBody>
                   <a:tcPr marL="91440" marR="91440" marT="41148" marB="41148" anchor="ctr">
                     <a:solidFill>
-                      <a:srgbClr val="EC7000"/>
+                      <a:srgbClr val="FF6200"/>
                     </a:solidFill>
                     <a:lnL>
                       <a:noFill/>
@@ -6789,7 +6789,7 @@
                       <a:r>
                         <a:rPr sz="1300" b="1">
                           <a:solidFill>
-                            <a:srgbClr val="1F1F1F"/>
+                            <a:srgbClr val="FFFFFF"/>
                           </a:solidFill>
                           <a:latin typeface="Calibri"/>
                         </a:rPr>
@@ -6799,7 +6799,7 @@
                   </a:txBody>
                   <a:tcPr marL="91440" marR="91440" marT="41148" marB="41148" anchor="ctr">
                     <a:solidFill>
-                      <a:srgbClr val="EC7000"/>
+                      <a:srgbClr val="FF6200"/>
                     </a:solidFill>
                     <a:lnL>
                       <a:noFill/>
@@ -6838,7 +6838,7 @@
                       <a:r>
                         <a:rPr sz="1300" b="1">
                           <a:solidFill>
-                            <a:srgbClr val="1F1F1F"/>
+                            <a:srgbClr val="FFFFFF"/>
                           </a:solidFill>
                           <a:latin typeface="Calibri"/>
                         </a:rPr>
@@ -6848,7 +6848,7 @@
                   </a:txBody>
                   <a:tcPr marL="91440" marR="91440" marT="41148" marB="41148" anchor="ctr">
                     <a:solidFill>
-                      <a:srgbClr val="EC7000"/>
+                      <a:srgbClr val="FF6200"/>
                     </a:solidFill>
                     <a:lnL>
                       <a:noFill/>
@@ -6940,7 +6940,7 @@
                           </a:solidFill>
                           <a:latin typeface="Calibri"/>
                         </a:rPr>
-                        <a:t>Seniores por série e júnior; modelos de apêndices não preenchidos</a:t>
+                        <a:t>Seniores por série e júnior</a:t>
                       </a:r>
                     </a:p>
                   </a:txBody>
@@ -7036,7 +7036,7 @@
                           </a:solidFill>
                           <a:latin typeface="Calibri"/>
                         </a:rPr>
-                        <a:t>Índice e spread não preenchidos no modelo; spread final não localizado</a:t>
+                        <a:t>-</a:t>
                       </a:r>
                     </a:p>
                   </a:txBody>
@@ -7434,7 +7434,7 @@
                       <a:r>
                         <a:rPr sz="1300" b="1">
                           <a:solidFill>
-                            <a:srgbClr val="1F1F1F"/>
+                            <a:srgbClr val="FFFFFF"/>
                           </a:solidFill>
                           <a:latin typeface="Calibri"/>
                         </a:rPr>
@@ -7444,7 +7444,7 @@
                   </a:txBody>
                   <a:tcPr marL="91440" marR="91440" marT="41148" marB="41148" anchor="ctr">
                     <a:solidFill>
-                      <a:srgbClr val="EC7000"/>
+                      <a:srgbClr val="FF6200"/>
                     </a:solidFill>
                     <a:lnL>
                       <a:noFill/>
@@ -7483,7 +7483,7 @@
                       <a:r>
                         <a:rPr sz="1300" b="1">
                           <a:solidFill>
-                            <a:srgbClr val="1F1F1F"/>
+                            <a:srgbClr val="FFFFFF"/>
                           </a:solidFill>
                           <a:latin typeface="Calibri"/>
                         </a:rPr>
@@ -7493,7 +7493,7 @@
                   </a:txBody>
                   <a:tcPr marL="91440" marR="91440" marT="41148" marB="41148" anchor="ctr">
                     <a:solidFill>
-                      <a:srgbClr val="EC7000"/>
+                      <a:srgbClr val="FF6200"/>
                     </a:solidFill>
                     <a:lnL>
                       <a:noFill/>
@@ -7585,7 +7585,7 @@
                           </a:solidFill>
                           <a:latin typeface="Calibri"/>
                         </a:rPr>
-                        <a:t>Prazo remetido ao apêndice; campos do modelo não preenchidos</a:t>
+                        <a:t>-</a:t>
                       </a:r>
                     </a:p>
                   </a:txBody>
@@ -7681,7 +7681,7 @@
                           </a:solidFill>
                           <a:latin typeface="Calibri"/>
                         </a:rPr>
-                        <a:t>Cronograma fechado não identificado; modelo de apêndice não preenchido</a:t>
+                        <a:t>-</a:t>
                       </a:r>
                     </a:p>
                   </a:txBody>
@@ -7779,7 +7779,7 @@
                           </a:solidFill>
                           <a:latin typeface="Calibri"/>
                         </a:rPr>
-                        <a:t>Última amortização conforme apêndice; vencimento civil não localizado</a:t>
+                        <a:t>Última amortização conforme apêndice</a:t>
                       </a:r>
                     </a:p>
                   </a:txBody>
@@ -7983,7 +7983,7 @@
                       <a:r>
                         <a:rPr sz="1300" b="1">
                           <a:solidFill>
-                            <a:srgbClr val="1F1F1F"/>
+                            <a:srgbClr val="FFFFFF"/>
                           </a:solidFill>
                           <a:latin typeface="Calibri"/>
                         </a:rPr>
@@ -7993,7 +7993,7 @@
                   </a:txBody>
                   <a:tcPr marL="91440" marR="91440" marT="41148" marB="41148" anchor="ctr">
                     <a:solidFill>
-                      <a:srgbClr val="EC7000"/>
+                      <a:srgbClr val="FF6200"/>
                     </a:solidFill>
                     <a:lnL>
                       <a:noFill/>
@@ -8032,7 +8032,7 @@
                       <a:r>
                         <a:rPr sz="1300" b="1">
                           <a:solidFill>
-                            <a:srgbClr val="1F1F1F"/>
+                            <a:srgbClr val="FFFFFF"/>
                           </a:solidFill>
                           <a:latin typeface="Calibri"/>
                         </a:rPr>
@@ -8042,7 +8042,7 @@
                   </a:txBody>
                   <a:tcPr marL="91440" marR="91440" marT="41148" marB="41148" anchor="ctr">
                     <a:solidFill>
-                      <a:srgbClr val="EC7000"/>
+                      <a:srgbClr val="FF6200"/>
                     </a:solidFill>
                     <a:lnL>
                       <a:noFill/>
@@ -8328,7 +8328,7 @@
                           </a:solidFill>
                           <a:latin typeface="Calibri"/>
                         </a:rPr>
-                        <a:t>VERT DTVM; taxa separada não individualizada nas cláusulas de remuneração</a:t>
+                        <a:t>VERT DTVM</a:t>
                       </a:r>
                     </a:p>
                   </a:txBody>
@@ -8532,7 +8532,7 @@
                       <a:r>
                         <a:rPr sz="1300" b="1">
                           <a:solidFill>
-                            <a:srgbClr val="1F1F1F"/>
+                            <a:srgbClr val="FFFFFF"/>
                           </a:solidFill>
                           <a:latin typeface="Calibri"/>
                         </a:rPr>
@@ -8542,7 +8542,7 @@
                   </a:txBody>
                   <a:tcPr marL="91440" marR="91440" marT="41148" marB="41148" anchor="ctr">
                     <a:solidFill>
-                      <a:srgbClr val="EC7000"/>
+                      <a:srgbClr val="FF6200"/>
                     </a:solidFill>
                     <a:lnL>
                       <a:noFill/>
@@ -8581,7 +8581,7 @@
                       <a:r>
                         <a:rPr sz="1300" b="1">
                           <a:solidFill>
-                            <a:srgbClr val="1F1F1F"/>
+                            <a:srgbClr val="FFFFFF"/>
                           </a:solidFill>
                           <a:latin typeface="Calibri"/>
                         </a:rPr>
@@ -8591,7 +8591,7 @@
                   </a:txBody>
                   <a:tcPr marL="91440" marR="91440" marT="41148" marB="41148" anchor="ctr">
                     <a:solidFill>
-                      <a:srgbClr val="EC7000"/>
+                      <a:srgbClr val="FF6200"/>
                     </a:solidFill>
                     <a:lnL>
                       <a:noFill/>
@@ -8705,7 +8705,7 @@
                           </a:solidFill>
                           <a:latin typeface="Calibri"/>
                         </a:rPr>
-                        <a:t>DC/PL e composição de cotas ajudam; validar numerador, denominador e versão contratual</a:t>
+                        <a:t>DC/PL e composição de cotas ajudam</a:t>
                       </a:r>
                     </a:p>
                   </a:txBody>
@@ -8993,7 +8993,7 @@
                           </a:solidFill>
                           <a:latin typeface="Calibri"/>
                         </a:rPr>
-                        <a:t>Sem competência IME carregada em cache local</a:t>
+                        <a:t>-</a:t>
                       </a:r>
                     </a:p>
                   </a:txBody>
